--- a/doc-mk/slides/dp2-arch-styles-dispatcher-vs-blackboard.pptx
+++ b/doc-mk/slides/dp2-arch-styles-dispatcher-vs-blackboard.pptx
@@ -11957,7 +11957,7 @@
                 <a:ea typeface="맑은 고딕"/>
                 <a:cs typeface="맑은 고딕"/>
               </a:rPr>
-              <a:t>① assign()</a:t>
+              <a:t>① submit()</a:t>
             </a:r>
           </a:p>
         </p:txBody>
